--- a/要件定義WBS案_20260806_v3.0.pptx
+++ b/要件定義WBS案_20260806_v3.0.pptx
@@ -13044,7 +13044,7 @@
         <p:spPr>
           <a:xfrm>
             <a:off x="219456" y="164592"/>
-            <a:ext cx="82296" cy="457200"/>
+            <a:ext cx="82296" cy="438912"/>
           </a:xfrm>
           <a:prstGeom prst="rect">
             <a:avLst/>
@@ -13087,7 +13087,7 @@
         <p:spPr>
           <a:xfrm>
             <a:off x="411480" y="128016"/>
-            <a:ext cx="8686800" cy="502920"/>
+            <a:ext cx="8778240" cy="475488"/>
           </a:xfrm>
           <a:prstGeom prst="rect">
             <a:avLst/>
@@ -13101,14 +13101,14 @@
           <a:lstStyle/>
           <a:p>
             <a:r>
-              <a:rPr sz="2000" b="1">
+              <a:rPr sz="1900" b="1">
                 <a:solidFill>
                   <a:srgbClr val="333333"/>
                 </a:solidFill>
                 <a:latin typeface="メイリオ"/>
                 <a:ea typeface="メイリオ"/>
               </a:rPr>
-              <a:t>要件定義の進め方（インプットとアウトプット）</a:t>
+              <a:t>要件定義の進め方（工程で使用する資料と成果物）</a:t>
             </a:r>
           </a:p>
         </p:txBody>
@@ -13121,8 +13121,8 @@
         </p:nvSpPr>
         <p:spPr>
           <a:xfrm>
-            <a:off x="429768" y="566928"/>
-            <a:ext cx="8686800" cy="292608"/>
+            <a:off x="429768" y="548640"/>
+            <a:ext cx="8778240" cy="274320"/>
           </a:xfrm>
           <a:prstGeom prst="rect">
             <a:avLst/>
@@ -13136,34 +13136,295 @@
           <a:lstStyle/>
           <a:p>
             <a:r>
-              <a:rPr sz="1050" b="0">
+              <a:rPr sz="1000" b="0">
                 <a:solidFill>
                   <a:srgbClr val="666666"/>
                 </a:solidFill>
                 <a:latin typeface="メイリオ"/>
                 <a:ea typeface="メイリオ"/>
               </a:rPr>
-              <a:t>各工程でできあがった資料が、そのまま次の工程の材料になり、順につながっていきます</a:t>
+              <a:t>各工程の成果物が、そのまま次の工程で使用する資料になります</a:t>
             </a:r>
           </a:p>
         </p:txBody>
       </p:sp>
       <p:sp>
         <p:nvSpPr>
-          <p:cNvPr id="5" name="Rounded Rectangle 4"/>
+          <p:cNvPr id="5" name="Rectangle 4"/>
           <p:cNvSpPr/>
           <p:nvPr/>
         </p:nvSpPr>
         <p:spPr>
           <a:xfrm>
-            <a:off x="3154680" y="1024128"/>
-            <a:ext cx="3246120" cy="749808"/>
+            <a:off x="228600" y="896112"/>
+            <a:ext cx="2606040" cy="274320"/>
+          </a:xfrm>
+          <a:prstGeom prst="rect">
+            <a:avLst/>
+          </a:prstGeom>
+          <a:solidFill>
+            <a:srgbClr val="00A693"/>
+          </a:solidFill>
+          <a:ln>
+            <a:noFill/>
+          </a:ln>
+        </p:spPr>
+        <p:style>
+          <a:lnRef idx="1">
+            <a:schemeClr val="accent1"/>
+          </a:lnRef>
+          <a:fillRef idx="3">
+            <a:schemeClr val="accent1"/>
+          </a:fillRef>
+          <a:effectRef idx="2">
+            <a:schemeClr val="accent1"/>
+          </a:effectRef>
+          <a:fontRef idx="minor">
+            <a:schemeClr val="lt1"/>
+          </a:fontRef>
+        </p:style>
+        <p:txBody>
+          <a:bodyPr rtlCol="0" anchor="ctr"/>
+          <a:lstStyle/>
+          <a:p>
+            <a:pPr algn="ctr"/>
+            <a:r>
+              <a:rPr sz="950" b="1">
+                <a:solidFill>
+                  <a:srgbClr val="FFFFFF"/>
+                </a:solidFill>
+                <a:latin typeface="メイリオ"/>
+                <a:ea typeface="メイリオ"/>
+              </a:rPr>
+              <a:t>工程で使用する資料</a:t>
+            </a:r>
+          </a:p>
+        </p:txBody>
+      </p:sp>
+      <p:sp>
+        <p:nvSpPr>
+          <p:cNvPr id="6" name="Rectangle 5"/>
+          <p:cNvSpPr/>
+          <p:nvPr/>
+        </p:nvSpPr>
+        <p:spPr>
+          <a:xfrm>
+            <a:off x="3154680" y="896112"/>
+            <a:ext cx="3246120" cy="274320"/>
+          </a:xfrm>
+          <a:prstGeom prst="rect">
+            <a:avLst/>
+          </a:prstGeom>
+          <a:solidFill>
+            <a:srgbClr val="00A693"/>
+          </a:solidFill>
+          <a:ln>
+            <a:noFill/>
+          </a:ln>
+        </p:spPr>
+        <p:style>
+          <a:lnRef idx="1">
+            <a:schemeClr val="accent1"/>
+          </a:lnRef>
+          <a:fillRef idx="3">
+            <a:schemeClr val="accent1"/>
+          </a:fillRef>
+          <a:effectRef idx="2">
+            <a:schemeClr val="accent1"/>
+          </a:effectRef>
+          <a:fontRef idx="minor">
+            <a:schemeClr val="lt1"/>
+          </a:fontRef>
+        </p:style>
+        <p:txBody>
+          <a:bodyPr rtlCol="0" anchor="ctr"/>
+          <a:lstStyle/>
+          <a:p>
+            <a:pPr algn="ctr"/>
+            <a:r>
+              <a:rPr sz="950" b="1">
+                <a:solidFill>
+                  <a:srgbClr val="FFFFFF"/>
+                </a:solidFill>
+                <a:latin typeface="メイリオ"/>
+                <a:ea typeface="メイリオ"/>
+              </a:rPr>
+              <a:t>工程</a:t>
+            </a:r>
+          </a:p>
+        </p:txBody>
+      </p:sp>
+      <p:sp>
+        <p:nvSpPr>
+          <p:cNvPr id="7" name="Rectangle 6"/>
+          <p:cNvSpPr/>
+          <p:nvPr/>
+        </p:nvSpPr>
+        <p:spPr>
+          <a:xfrm>
+            <a:off x="6720840" y="896112"/>
+            <a:ext cx="2971800" cy="274320"/>
+          </a:xfrm>
+          <a:prstGeom prst="rect">
+            <a:avLst/>
+          </a:prstGeom>
+          <a:solidFill>
+            <a:srgbClr val="00A693"/>
+          </a:solidFill>
+          <a:ln>
+            <a:noFill/>
+          </a:ln>
+        </p:spPr>
+        <p:style>
+          <a:lnRef idx="1">
+            <a:schemeClr val="accent1"/>
+          </a:lnRef>
+          <a:fillRef idx="3">
+            <a:schemeClr val="accent1"/>
+          </a:fillRef>
+          <a:effectRef idx="2">
+            <a:schemeClr val="accent1"/>
+          </a:effectRef>
+          <a:fontRef idx="minor">
+            <a:schemeClr val="lt1"/>
+          </a:fontRef>
+        </p:style>
+        <p:txBody>
+          <a:bodyPr rtlCol="0" anchor="ctr"/>
+          <a:lstStyle/>
+          <a:p>
+            <a:pPr algn="ctr"/>
+            <a:r>
+              <a:rPr sz="950" b="1">
+                <a:solidFill>
+                  <a:srgbClr val="FFFFFF"/>
+                </a:solidFill>
+                <a:latin typeface="メイリオ"/>
+                <a:ea typeface="メイリオ"/>
+              </a:rPr>
+              <a:t>成果物</a:t>
+            </a:r>
+          </a:p>
+        </p:txBody>
+      </p:sp>
+      <p:sp>
+        <p:nvSpPr>
+          <p:cNvPr id="8" name="Rounded Rectangle 7"/>
+          <p:cNvSpPr/>
+          <p:nvPr/>
+        </p:nvSpPr>
+        <p:spPr>
+          <a:xfrm>
+            <a:off x="228600" y="1298448"/>
+            <a:ext cx="2606040" cy="786384"/>
           </a:xfrm>
           <a:prstGeom prst="roundRect">
             <a:avLst/>
           </a:prstGeom>
           <a:solidFill>
-            <a:srgbClr val="DFF4F1"/>
+            <a:srgbClr val="F4FBFA"/>
+          </a:solidFill>
+          <a:ln w="11430">
+            <a:solidFill>
+              <a:srgbClr val="BFD9D5"/>
+            </a:solidFill>
+          </a:ln>
+        </p:spPr>
+        <p:style>
+          <a:lnRef idx="1">
+            <a:schemeClr val="accent1"/>
+          </a:lnRef>
+          <a:fillRef idx="3">
+            <a:schemeClr val="accent1"/>
+          </a:fillRef>
+          <a:effectRef idx="2">
+            <a:schemeClr val="accent1"/>
+          </a:effectRef>
+          <a:fontRef idx="minor">
+            <a:schemeClr val="lt1"/>
+          </a:fontRef>
+        </p:style>
+        <p:txBody>
+          <a:bodyPr rtlCol="0" anchor="ctr" wrap="square" lIns="64008" rIns="45720" tIns="27432" bIns="27432"/>
+          <a:lstStyle/>
+          <a:p>
+            <a:pPr algn="l">
+              <a:spcBef>
+                <a:spcPts val="0"/>
+              </a:spcBef>
+              <a:spcAft>
+                <a:spcPts val="0"/>
+              </a:spcAft>
+            </a:pPr>
+            <a:r>
+              <a:rPr sz="760" b="0">
+                <a:solidFill>
+                  <a:srgbClr val="333333"/>
+                </a:solidFill>
+                <a:latin typeface="メイリオ"/>
+                <a:ea typeface="メイリオ"/>
+              </a:rPr>
+              <a:t>・基幹インターフェイス一覧・詳細</a:t>
+            </a:r>
+          </a:p>
+          <a:p>
+            <a:pPr algn="l">
+              <a:spcBef>
+                <a:spcPts val="0"/>
+              </a:spcBef>
+              <a:spcAft>
+                <a:spcPts val="0"/>
+              </a:spcAft>
+            </a:pPr>
+            <a:r>
+              <a:rPr sz="760" b="0">
+                <a:solidFill>
+                  <a:srgbClr val="333333"/>
+                </a:solidFill>
+                <a:latin typeface="メイリオ"/>
+                <a:ea typeface="メイリオ"/>
+              </a:rPr>
+              <a:t>・EDIインターフェイス一覧・詳細</a:t>
+            </a:r>
+          </a:p>
+          <a:p>
+            <a:pPr algn="l">
+              <a:spcBef>
+                <a:spcPts val="0"/>
+              </a:spcBef>
+              <a:spcAft>
+                <a:spcPts val="0"/>
+              </a:spcAft>
+            </a:pPr>
+            <a:r>
+              <a:rPr sz="760" b="0">
+                <a:solidFill>
+                  <a:srgbClr val="333333"/>
+                </a:solidFill>
+                <a:latin typeface="メイリオ"/>
+                <a:ea typeface="メイリオ"/>
+              </a:rPr>
+              <a:t>・Excel等システム外の管理データ・帳票</a:t>
+            </a:r>
+          </a:p>
+        </p:txBody>
+      </p:sp>
+      <p:sp>
+        <p:nvSpPr>
+          <p:cNvPr id="9" name="Rounded Rectangle 8"/>
+          <p:cNvSpPr/>
+          <p:nvPr/>
+        </p:nvSpPr>
+        <p:spPr>
+          <a:xfrm>
+            <a:off x="3154680" y="1298448"/>
+            <a:ext cx="3246120" cy="786384"/>
+          </a:xfrm>
+          <a:prstGeom prst="roundRect">
+            <a:avLst/>
+          </a:prstGeom>
+          <a:solidFill>
+            <a:srgbClr val="E8F6F4"/>
           </a:solidFill>
           <a:ln w="19050">
             <a:solidFill>
@@ -13189,7 +13450,14 @@
           <a:bodyPr rtlCol="0" anchor="ctr" wrap="square"/>
           <a:lstStyle/>
           <a:p>
-            <a:pPr algn="ctr"/>
+            <a:pPr algn="ctr">
+              <a:spcBef>
+                <a:spcPts val="0"/>
+              </a:spcBef>
+              <a:spcAft>
+                <a:spcPts val="0"/>
+              </a:spcAft>
+            </a:pPr>
             <a:r>
               <a:rPr sz="1100" b="1">
                 <a:solidFill>
@@ -13202,11 +13470,15 @@
             </a:r>
           </a:p>
           <a:p>
-            <a:pPr algn="ctr"/>
+            <a:pPr algn="ctr">
+              <a:spcBef>
+                <a:spcPts val="100"/>
+              </a:spcBef>
+            </a:pPr>
             <a:r>
-              <a:rPr sz="800" b="1">
-                <a:solidFill>
-                  <a:srgbClr val="E67E22"/>
+              <a:rPr sz="780" b="0">
+                <a:solidFill>
+                  <a:srgbClr val="666666"/>
                 </a:solidFill>
                 <a:latin typeface="メイリオ"/>
                 <a:ea typeface="メイリオ"/>
@@ -13218,24 +13490,24 @@
       </p:sp>
       <p:sp>
         <p:nvSpPr>
-          <p:cNvPr id="6" name="Rounded Rectangle 5"/>
+          <p:cNvPr id="10" name="Rounded Rectangle 9"/>
           <p:cNvSpPr/>
           <p:nvPr/>
         </p:nvSpPr>
         <p:spPr>
           <a:xfrm>
-            <a:off x="228600" y="1010412"/>
-            <a:ext cx="2606040" cy="777240"/>
+            <a:off x="6720840" y="1298448"/>
+            <a:ext cx="2971800" cy="786384"/>
           </a:xfrm>
           <a:prstGeom prst="roundRect">
             <a:avLst/>
           </a:prstGeom>
           <a:solidFill>
-            <a:srgbClr val="FFF3E8"/>
+            <a:srgbClr val="F4FBFA"/>
           </a:solidFill>
-          <a:ln w="12700">
+          <a:ln w="11430">
             <a:solidFill>
-              <a:srgbClr val="E67E22"/>
+              <a:srgbClr val="BFD9D5"/>
             </a:solidFill>
           </a:ln>
         </p:spPr>
@@ -13254,184 +13526,26 @@
           </a:fontRef>
         </p:style>
         <p:txBody>
-          <a:bodyPr rtlCol="0" anchor="ctr" wrap="square" tIns="27432" bIns="18288" lIns="54864"/>
+          <a:bodyPr rtlCol="0" anchor="ctr" wrap="square" lIns="64008" rIns="45720" tIns="27432" bIns="27432"/>
           <a:lstStyle/>
           <a:p>
-            <a:pPr algn="ctr"/>
+            <a:pPr algn="ctr">
+              <a:spcBef>
+                <a:spcPts val="0"/>
+              </a:spcBef>
+              <a:spcAft>
+                <a:spcPts val="0"/>
+              </a:spcAft>
+            </a:pPr>
             <a:r>
-              <a:rPr sz="750" b="1">
-                <a:solidFill>
-                  <a:srgbClr val="E67E22"/>
+              <a:rPr sz="840" b="1">
+                <a:solidFill>
+                  <a:srgbClr val="333333"/>
                 </a:solidFill>
                 <a:latin typeface="メイリオ"/>
                 <a:ea typeface="メイリオ"/>
               </a:rPr>
-              <a:t>ご提供／ヒアリング</a:t>
-            </a:r>
-          </a:p>
-          <a:p>
-            <a:pPr>
-              <a:spcBef>
-                <a:spcPts val="0"/>
-              </a:spcBef>
-              <a:spcAft>
-                <a:spcPts val="0"/>
-              </a:spcAft>
-            </a:pPr>
-            <a:r>
-              <a:rPr sz="720" b="0">
-                <a:solidFill>
-                  <a:srgbClr val="333333"/>
-                </a:solidFill>
-                <a:latin typeface="メイリオ"/>
-                <a:ea typeface="メイリオ"/>
-              </a:rPr>
-              <a:t>・基幹インターフェイス一覧・詳細</a:t>
-            </a:r>
-          </a:p>
-          <a:p>
-            <a:pPr>
-              <a:spcBef>
-                <a:spcPts val="0"/>
-              </a:spcBef>
-              <a:spcAft>
-                <a:spcPts val="0"/>
-              </a:spcAft>
-            </a:pPr>
-            <a:r>
-              <a:rPr sz="720" b="0">
-                <a:solidFill>
-                  <a:srgbClr val="333333"/>
-                </a:solidFill>
-                <a:latin typeface="メイリオ"/>
-                <a:ea typeface="メイリオ"/>
-              </a:rPr>
-              <a:t>・EDIインターフェイス一覧・詳細</a:t>
-            </a:r>
-          </a:p>
-          <a:p>
-            <a:pPr>
-              <a:spcBef>
-                <a:spcPts val="0"/>
-              </a:spcBef>
-              <a:spcAft>
-                <a:spcPts val="0"/>
-              </a:spcAft>
-            </a:pPr>
-            <a:r>
-              <a:rPr sz="720" b="0">
-                <a:solidFill>
-                  <a:srgbClr val="333333"/>
-                </a:solidFill>
-                <a:latin typeface="メイリオ"/>
-                <a:ea typeface="メイリオ"/>
-              </a:rPr>
-              <a:t>・Excel等システム外の管理データ・帳票</a:t>
-            </a:r>
-          </a:p>
-        </p:txBody>
-      </p:sp>
-      <p:sp>
-        <p:nvSpPr>
-          <p:cNvPr id="7" name="Right Arrow 6"/>
-          <p:cNvSpPr/>
-          <p:nvPr/>
-        </p:nvSpPr>
-        <p:spPr>
-          <a:xfrm>
-            <a:off x="2852928" y="1330452"/>
-            <a:ext cx="265176" cy="137160"/>
-          </a:xfrm>
-          <a:prstGeom prst="rightArrow">
-            <a:avLst/>
-          </a:prstGeom>
-          <a:solidFill>
-            <a:srgbClr val="E67E22"/>
-          </a:solidFill>
-          <a:ln>
-            <a:noFill/>
-          </a:ln>
-        </p:spPr>
-        <p:style>
-          <a:lnRef idx="1">
-            <a:schemeClr val="accent1"/>
-          </a:lnRef>
-          <a:fillRef idx="3">
-            <a:schemeClr val="accent1"/>
-          </a:fillRef>
-          <a:effectRef idx="2">
-            <a:schemeClr val="accent1"/>
-          </a:effectRef>
-          <a:fontRef idx="minor">
-            <a:schemeClr val="lt1"/>
-          </a:fontRef>
-        </p:style>
-        <p:txBody>
-          <a:bodyPr rtlCol="0" anchor="ctr"/>
-          <a:lstStyle/>
-          <a:p>
-            <a:pPr algn="ctr"/>
-          </a:p>
-        </p:txBody>
-      </p:sp>
-      <p:sp>
-        <p:nvSpPr>
-          <p:cNvPr id="8" name="Rounded Rectangle 7"/>
-          <p:cNvSpPr/>
-          <p:nvPr/>
-        </p:nvSpPr>
-        <p:spPr>
-          <a:xfrm>
-            <a:off x="6720840" y="1243584"/>
-            <a:ext cx="2971800" cy="512064"/>
-          </a:xfrm>
-          <a:prstGeom prst="roundRect">
-            <a:avLst/>
-          </a:prstGeom>
-          <a:solidFill>
-            <a:srgbClr val="E9F5EA"/>
-          </a:solidFill>
-          <a:ln w="12700">
-            <a:solidFill>
-              <a:srgbClr val="2E7D32"/>
-            </a:solidFill>
-          </a:ln>
-        </p:spPr>
-        <p:style>
-          <a:lnRef idx="1">
-            <a:schemeClr val="accent1"/>
-          </a:lnRef>
-          <a:fillRef idx="3">
-            <a:schemeClr val="accent1"/>
-          </a:fillRef>
-          <a:effectRef idx="2">
-            <a:schemeClr val="accent1"/>
-          </a:effectRef>
-          <a:fontRef idx="minor">
-            <a:schemeClr val="lt1"/>
-          </a:fontRef>
-        </p:style>
-        <p:txBody>
-          <a:bodyPr rtlCol="0" anchor="ctr" wrap="square"/>
-          <a:lstStyle/>
-          <a:p>
-            <a:pPr algn="ctr">
-              <a:spcBef>
-                <a:spcPts val="0"/>
-              </a:spcBef>
-              <a:spcAft>
-                <a:spcPts val="0"/>
-              </a:spcAft>
-            </a:pPr>
-            <a:r>
-              <a:rPr sz="850" b="1">
-                <a:solidFill>
-                  <a:srgbClr val="2E7D32"/>
-                </a:solidFill>
-                <a:latin typeface="メイリオ"/>
-                <a:ea typeface="メイリオ"/>
-              </a:rPr>
-              <a:t>▶ 基幹システム仕様</a:t>
+              <a:t>基幹システム仕様</a:t>
             </a:r>
           </a:p>
           <a:p>
@@ -13444,9 +13558,9 @@
               </a:spcAft>
             </a:pPr>
             <a:r>
-              <a:rPr sz="850" b="1">
-                <a:solidFill>
-                  <a:srgbClr val="2E7D32"/>
+              <a:rPr sz="840" b="1">
+                <a:solidFill>
+                  <a:srgbClr val="333333"/>
                 </a:solidFill>
                 <a:latin typeface="メイリオ"/>
                 <a:ea typeface="メイリオ"/>
@@ -13456,64 +13570,93 @@
           </a:p>
         </p:txBody>
       </p:sp>
-      <p:sp>
-        <p:nvSpPr>
-          <p:cNvPr id="9" name="Right Arrow 8"/>
-          <p:cNvSpPr/>
-          <p:nvPr/>
-        </p:nvSpPr>
-        <p:spPr>
-          <a:xfrm>
-            <a:off x="6419088" y="1330452"/>
-            <a:ext cx="265175" cy="137160"/>
-          </a:xfrm>
-          <a:prstGeom prst="rightArrow">
-            <a:avLst/>
-          </a:prstGeom>
-          <a:solidFill>
-            <a:srgbClr val="2E7D32"/>
-          </a:solidFill>
-          <a:ln>
-            <a:noFill/>
-          </a:ln>
-        </p:spPr>
-        <p:style>
-          <a:lnRef idx="1">
-            <a:schemeClr val="accent1"/>
-          </a:lnRef>
-          <a:fillRef idx="3">
-            <a:schemeClr val="accent1"/>
-          </a:fillRef>
-          <a:effectRef idx="2">
-            <a:schemeClr val="accent1"/>
-          </a:effectRef>
-          <a:fontRef idx="minor">
-            <a:schemeClr val="lt1"/>
-          </a:fontRef>
-        </p:style>
-        <p:txBody>
-          <a:bodyPr rtlCol="0" anchor="ctr"/>
-          <a:lstStyle/>
-          <a:p>
-            <a:pPr algn="ctr"/>
-          </a:p>
-        </p:txBody>
-      </p:sp>
       <p:cxnSp>
         <p:nvCxnSpPr>
-          <p:cNvPr id="10" name="Connector 9"/>
+          <p:cNvPr id="11" name="Connector 10"/>
           <p:cNvCxnSpPr/>
           <p:nvPr/>
         </p:nvCxnSpPr>
         <p:spPr>
           <a:xfrm>
-            <a:off x="4777740" y="1773936"/>
-            <a:ext cx="0" cy="274320"/>
+            <a:off x="2862072" y="1691639"/>
+            <a:ext cx="265176" cy="0"/>
           </a:xfrm>
           <a:prstGeom prst="line">
             <a:avLst/>
           </a:prstGeom>
-          <a:ln w="31750">
+          <a:ln w="22225">
+            <a:solidFill>
+              <a:srgbClr val="00A693"/>
+            </a:solidFill>
+            <a:tailEnd type="triangle"/>
+          </a:ln>
+        </p:spPr>
+        <p:style>
+          <a:lnRef idx="2">
+            <a:schemeClr val="accent1"/>
+          </a:lnRef>
+          <a:fillRef idx="0">
+            <a:schemeClr val="accent1"/>
+          </a:fillRef>
+          <a:effectRef idx="1">
+            <a:schemeClr val="accent1"/>
+          </a:effectRef>
+          <a:fontRef idx="minor">
+            <a:schemeClr val="tx1"/>
+          </a:fontRef>
+        </p:style>
+      </p:cxnSp>
+      <p:cxnSp>
+        <p:nvCxnSpPr>
+          <p:cNvPr id="12" name="Connector 11"/>
+          <p:cNvCxnSpPr/>
+          <p:nvPr/>
+        </p:nvCxnSpPr>
+        <p:spPr>
+          <a:xfrm>
+            <a:off x="6428232" y="1691639"/>
+            <a:ext cx="265175" cy="0"/>
+          </a:xfrm>
+          <a:prstGeom prst="line">
+            <a:avLst/>
+          </a:prstGeom>
+          <a:ln w="22225">
+            <a:solidFill>
+              <a:srgbClr val="00A693"/>
+            </a:solidFill>
+            <a:tailEnd type="triangle"/>
+          </a:ln>
+        </p:spPr>
+        <p:style>
+          <a:lnRef idx="2">
+            <a:schemeClr val="accent1"/>
+          </a:lnRef>
+          <a:fillRef idx="0">
+            <a:schemeClr val="accent1"/>
+          </a:fillRef>
+          <a:effectRef idx="1">
+            <a:schemeClr val="accent1"/>
+          </a:effectRef>
+          <a:fontRef idx="minor">
+            <a:schemeClr val="tx1"/>
+          </a:fontRef>
+        </p:style>
+      </p:cxnSp>
+      <p:cxnSp>
+        <p:nvCxnSpPr>
+          <p:cNvPr id="13" name="Connector 12"/>
+          <p:cNvCxnSpPr/>
+          <p:nvPr/>
+        </p:nvCxnSpPr>
+        <p:spPr>
+          <a:xfrm>
+            <a:off x="4777740" y="2084831"/>
+            <a:ext cx="0" cy="164593"/>
+          </a:xfrm>
+          <a:prstGeom prst="line">
+            <a:avLst/>
+          </a:prstGeom>
+          <a:ln w="22225">
             <a:solidFill>
               <a:srgbClr val="00A693"/>
             </a:solidFill>
@@ -13537,14 +13680,14 @@
       </p:cxnSp>
       <p:sp>
         <p:nvSpPr>
-          <p:cNvPr id="11" name="TextBox 10"/>
+          <p:cNvPr id="14" name="TextBox 13"/>
           <p:cNvSpPr txBox="1"/>
           <p:nvPr/>
         </p:nvSpPr>
         <p:spPr>
           <a:xfrm>
-            <a:off x="4814316" y="1773936"/>
-            <a:ext cx="2560320" cy="182880"/>
+            <a:off x="4823459" y="2066543"/>
+            <a:ext cx="2651760" cy="182880"/>
           </a:xfrm>
           <a:prstGeom prst="rect">
             <a:avLst/>
@@ -13558,34 +13701,116 @@
           <a:lstStyle/>
           <a:p>
             <a:r>
-              <a:rPr sz="720" b="0">
-                <a:solidFill>
-                  <a:srgbClr val="2E7D32"/>
+              <a:rPr sz="700" b="0">
+                <a:solidFill>
+                  <a:srgbClr val="666666"/>
                 </a:solidFill>
                 <a:latin typeface="メイリオ"/>
                 <a:ea typeface="メイリオ"/>
               </a:rPr>
-              <a:t>できた資料を次の材料にする</a:t>
+              <a:t>成果物を次工程の資料として使用</a:t>
             </a:r>
           </a:p>
         </p:txBody>
       </p:sp>
       <p:sp>
         <p:nvSpPr>
-          <p:cNvPr id="12" name="Rounded Rectangle 11"/>
+          <p:cNvPr id="15" name="Rounded Rectangle 14"/>
           <p:cNvSpPr/>
           <p:nvPr/>
         </p:nvSpPr>
         <p:spPr>
           <a:xfrm>
-            <a:off x="3154680" y="2048256"/>
-            <a:ext cx="3246120" cy="749808"/>
+            <a:off x="228600" y="2267712"/>
+            <a:ext cx="2606040" cy="786384"/>
           </a:xfrm>
           <a:prstGeom prst="roundRect">
             <a:avLst/>
           </a:prstGeom>
           <a:solidFill>
-            <a:srgbClr val="DFF4F1"/>
+            <a:srgbClr val="F4FBFA"/>
+          </a:solidFill>
+          <a:ln w="11430">
+            <a:solidFill>
+              <a:srgbClr val="BFD9D5"/>
+            </a:solidFill>
+          </a:ln>
+        </p:spPr>
+        <p:style>
+          <a:lnRef idx="1">
+            <a:schemeClr val="accent1"/>
+          </a:lnRef>
+          <a:fillRef idx="3">
+            <a:schemeClr val="accent1"/>
+          </a:fillRef>
+          <a:effectRef idx="2">
+            <a:schemeClr val="accent1"/>
+          </a:effectRef>
+          <a:fontRef idx="minor">
+            <a:schemeClr val="lt1"/>
+          </a:fontRef>
+        </p:style>
+        <p:txBody>
+          <a:bodyPr rtlCol="0" anchor="ctr" wrap="square" lIns="64008" rIns="45720" tIns="27432" bIns="27432"/>
+          <a:lstStyle/>
+          <a:p>
+            <a:pPr algn="l">
+              <a:spcBef>
+                <a:spcPts val="0"/>
+              </a:spcBef>
+              <a:spcAft>
+                <a:spcPts val="0"/>
+              </a:spcAft>
+            </a:pPr>
+            <a:r>
+              <a:rPr sz="760" b="0">
+                <a:solidFill>
+                  <a:srgbClr val="333333"/>
+                </a:solidFill>
+                <a:latin typeface="メイリオ"/>
+                <a:ea typeface="メイリオ"/>
+              </a:rPr>
+              <a:t>・要件定義書_概略業務フロー（仮）</a:t>
+            </a:r>
+          </a:p>
+          <a:p>
+            <a:pPr algn="l">
+              <a:spcBef>
+                <a:spcPts val="0"/>
+              </a:spcBef>
+              <a:spcAft>
+                <a:spcPts val="0"/>
+              </a:spcAft>
+            </a:pPr>
+            <a:r>
+              <a:rPr sz="760" b="0">
+                <a:solidFill>
+                  <a:srgbClr val="333333"/>
+                </a:solidFill>
+                <a:latin typeface="メイリオ"/>
+                <a:ea typeface="メイリオ"/>
+              </a:rPr>
+              <a:t>・①の基幹システム仕様</a:t>
+            </a:r>
+          </a:p>
+        </p:txBody>
+      </p:sp>
+      <p:sp>
+        <p:nvSpPr>
+          <p:cNvPr id="16" name="Rounded Rectangle 15"/>
+          <p:cNvSpPr/>
+          <p:nvPr/>
+        </p:nvSpPr>
+        <p:spPr>
+          <a:xfrm>
+            <a:off x="3154680" y="2267712"/>
+            <a:ext cx="3246120" cy="786384"/>
+          </a:xfrm>
+          <a:prstGeom prst="roundRect">
+            <a:avLst/>
+          </a:prstGeom>
+          <a:solidFill>
+            <a:srgbClr val="E8F6F4"/>
           </a:solidFill>
           <a:ln w="19050">
             <a:solidFill>
@@ -13611,7 +13836,14 @@
           <a:bodyPr rtlCol="0" anchor="ctr" wrap="square"/>
           <a:lstStyle/>
           <a:p>
-            <a:pPr algn="ctr"/>
+            <a:pPr algn="ctr">
+              <a:spcBef>
+                <a:spcPts val="0"/>
+              </a:spcBef>
+              <a:spcAft>
+                <a:spcPts val="0"/>
+              </a:spcAft>
+            </a:pPr>
             <a:r>
               <a:rPr sz="1100" b="1">
                 <a:solidFill>
@@ -13624,40 +13856,44 @@
             </a:r>
           </a:p>
           <a:p>
-            <a:pPr algn="ctr"/>
+            <a:pPr algn="ctr">
+              <a:spcBef>
+                <a:spcPts val="100"/>
+              </a:spcBef>
+            </a:pPr>
             <a:r>
-              <a:rPr sz="800" b="1">
-                <a:solidFill>
-                  <a:srgbClr val="007A6E"/>
+              <a:rPr sz="780" b="0">
+                <a:solidFill>
+                  <a:srgbClr val="666666"/>
                 </a:solidFill>
                 <a:latin typeface="メイリオ"/>
                 <a:ea typeface="メイリオ"/>
               </a:rPr>
-              <a:t>【弊社が案を作成→打合せで完成】</a:t>
+              <a:t>【弊社作成 → 打合せで完成】</a:t>
             </a:r>
           </a:p>
         </p:txBody>
       </p:sp>
       <p:sp>
         <p:nvSpPr>
-          <p:cNvPr id="13" name="Rounded Rectangle 12"/>
+          <p:cNvPr id="17" name="Rounded Rectangle 16"/>
           <p:cNvSpPr/>
           <p:nvPr/>
         </p:nvSpPr>
         <p:spPr>
           <a:xfrm>
-            <a:off x="228600" y="2208276"/>
-            <a:ext cx="2606040" cy="429768"/>
+            <a:off x="6720840" y="2267712"/>
+            <a:ext cx="2971800" cy="786384"/>
           </a:xfrm>
           <a:prstGeom prst="roundRect">
             <a:avLst/>
           </a:prstGeom>
           <a:solidFill>
-            <a:srgbClr val="FFF3E8"/>
+            <a:srgbClr val="F4FBFA"/>
           </a:solidFill>
-          <a:ln w="12700">
+          <a:ln w="11430">
             <a:solidFill>
-              <a:srgbClr val="E67E22"/>
+              <a:srgbClr val="BFD9D5"/>
             </a:solidFill>
           </a:ln>
         </p:spPr>
@@ -13676,206 +13912,117 @@
           </a:fontRef>
         </p:style>
         <p:txBody>
-          <a:bodyPr rtlCol="0" anchor="ctr" wrap="square" tIns="27432" bIns="18288" lIns="54864"/>
+          <a:bodyPr rtlCol="0" anchor="ctr" wrap="square" lIns="64008" rIns="45720" tIns="27432" bIns="27432"/>
           <a:lstStyle/>
           <a:p>
-            <a:pPr algn="ctr"/>
+            <a:pPr algn="ctr">
+              <a:spcBef>
+                <a:spcPts val="0"/>
+              </a:spcBef>
+              <a:spcAft>
+                <a:spcPts val="0"/>
+              </a:spcAft>
+            </a:pPr>
             <a:r>
-              <a:rPr sz="750" b="1">
-                <a:solidFill>
-                  <a:srgbClr val="E67E22"/>
+              <a:rPr sz="840" b="1">
+                <a:solidFill>
+                  <a:srgbClr val="333333"/>
                 </a:solidFill>
                 <a:latin typeface="メイリオ"/>
                 <a:ea typeface="メイリオ"/>
               </a:rPr>
-              <a:t>ご提供／ヒアリング</a:t>
+              <a:t>要件定義書_概略業務フロー</a:t>
             </a:r>
-          </a:p>
-          <a:p>
-            <a:pPr>
-              <a:spcBef>
-                <a:spcPts val="0"/>
-              </a:spcBef>
-              <a:spcAft>
-                <a:spcPts val="0"/>
-              </a:spcAft>
-            </a:pPr>
-            <a:r>
-              <a:rPr sz="720" b="0">
-                <a:solidFill>
-                  <a:srgbClr val="333333"/>
-                </a:solidFill>
-                <a:latin typeface="メイリオ"/>
-                <a:ea typeface="メイリオ"/>
-              </a:rPr>
-              <a:t>・ヒアリング内容</a:t>
-            </a:r>
-          </a:p>
-        </p:txBody>
-      </p:sp>
-      <p:sp>
-        <p:nvSpPr>
-          <p:cNvPr id="14" name="Right Arrow 13"/>
-          <p:cNvSpPr/>
-          <p:nvPr/>
-        </p:nvSpPr>
-        <p:spPr>
-          <a:xfrm>
-            <a:off x="2852928" y="2354580"/>
-            <a:ext cx="265176" cy="137160"/>
-          </a:xfrm>
-          <a:prstGeom prst="rightArrow">
-            <a:avLst/>
-          </a:prstGeom>
-          <a:solidFill>
-            <a:srgbClr val="E67E22"/>
-          </a:solidFill>
-          <a:ln>
-            <a:noFill/>
-          </a:ln>
-        </p:spPr>
-        <p:style>
-          <a:lnRef idx="1">
-            <a:schemeClr val="accent1"/>
-          </a:lnRef>
-          <a:fillRef idx="3">
-            <a:schemeClr val="accent1"/>
-          </a:fillRef>
-          <a:effectRef idx="2">
-            <a:schemeClr val="accent1"/>
-          </a:effectRef>
-          <a:fontRef idx="minor">
-            <a:schemeClr val="lt1"/>
-          </a:fontRef>
-        </p:style>
-        <p:txBody>
-          <a:bodyPr rtlCol="0" anchor="ctr"/>
-          <a:lstStyle/>
-          <a:p>
-            <a:pPr algn="ctr"/>
-          </a:p>
-        </p:txBody>
-      </p:sp>
-      <p:sp>
-        <p:nvSpPr>
-          <p:cNvPr id="15" name="Rounded Rectangle 14"/>
-          <p:cNvSpPr/>
-          <p:nvPr/>
-        </p:nvSpPr>
-        <p:spPr>
-          <a:xfrm>
-            <a:off x="6720840" y="2267712"/>
-            <a:ext cx="2971800" cy="310896"/>
-          </a:xfrm>
-          <a:prstGeom prst="roundRect">
-            <a:avLst/>
-          </a:prstGeom>
-          <a:solidFill>
-            <a:srgbClr val="E9F5EA"/>
-          </a:solidFill>
-          <a:ln w="12700">
-            <a:solidFill>
-              <a:srgbClr val="2E7D32"/>
-            </a:solidFill>
-          </a:ln>
-        </p:spPr>
-        <p:style>
-          <a:lnRef idx="1">
-            <a:schemeClr val="accent1"/>
-          </a:lnRef>
-          <a:fillRef idx="3">
-            <a:schemeClr val="accent1"/>
-          </a:fillRef>
-          <a:effectRef idx="2">
-            <a:schemeClr val="accent1"/>
-          </a:effectRef>
-          <a:fontRef idx="minor">
-            <a:schemeClr val="lt1"/>
-          </a:fontRef>
-        </p:style>
-        <p:txBody>
-          <a:bodyPr rtlCol="0" anchor="ctr" wrap="square"/>
-          <a:lstStyle/>
-          <a:p>
-            <a:pPr algn="ctr">
-              <a:spcBef>
-                <a:spcPts val="0"/>
-              </a:spcBef>
-              <a:spcAft>
-                <a:spcPts val="0"/>
-              </a:spcAft>
-            </a:pPr>
-            <a:r>
-              <a:rPr sz="850" b="1">
-                <a:solidFill>
-                  <a:srgbClr val="2E7D32"/>
-                </a:solidFill>
-                <a:latin typeface="メイリオ"/>
-                <a:ea typeface="メイリオ"/>
-              </a:rPr>
-              <a:t>▶ 要件定義書_概略業務フロー</a:t>
-            </a:r>
-          </a:p>
-        </p:txBody>
-      </p:sp>
-      <p:sp>
-        <p:nvSpPr>
-          <p:cNvPr id="16" name="Right Arrow 15"/>
-          <p:cNvSpPr/>
-          <p:nvPr/>
-        </p:nvSpPr>
-        <p:spPr>
-          <a:xfrm>
-            <a:off x="6419088" y="2354580"/>
-            <a:ext cx="265175" cy="137160"/>
-          </a:xfrm>
-          <a:prstGeom prst="rightArrow">
-            <a:avLst/>
-          </a:prstGeom>
-          <a:solidFill>
-            <a:srgbClr val="2E7D32"/>
-          </a:solidFill>
-          <a:ln>
-            <a:noFill/>
-          </a:ln>
-        </p:spPr>
-        <p:style>
-          <a:lnRef idx="1">
-            <a:schemeClr val="accent1"/>
-          </a:lnRef>
-          <a:fillRef idx="3">
-            <a:schemeClr val="accent1"/>
-          </a:fillRef>
-          <a:effectRef idx="2">
-            <a:schemeClr val="accent1"/>
-          </a:effectRef>
-          <a:fontRef idx="minor">
-            <a:schemeClr val="lt1"/>
-          </a:fontRef>
-        </p:style>
-        <p:txBody>
-          <a:bodyPr rtlCol="0" anchor="ctr"/>
-          <a:lstStyle/>
-          <a:p>
-            <a:pPr algn="ctr"/>
           </a:p>
         </p:txBody>
       </p:sp>
       <p:cxnSp>
         <p:nvCxnSpPr>
-          <p:cNvPr id="17" name="Connector 16"/>
+          <p:cNvPr id="18" name="Connector 17"/>
           <p:cNvCxnSpPr/>
           <p:nvPr/>
         </p:nvCxnSpPr>
         <p:spPr>
           <a:xfrm>
-            <a:off x="4777740" y="2798064"/>
-            <a:ext cx="0" cy="274320"/>
+            <a:off x="2862072" y="2660904"/>
+            <a:ext cx="265176" cy="0"/>
           </a:xfrm>
           <a:prstGeom prst="line">
             <a:avLst/>
           </a:prstGeom>
-          <a:ln w="31750">
+          <a:ln w="22225">
+            <a:solidFill>
+              <a:srgbClr val="00A693"/>
+            </a:solidFill>
+            <a:tailEnd type="triangle"/>
+          </a:ln>
+        </p:spPr>
+        <p:style>
+          <a:lnRef idx="2">
+            <a:schemeClr val="accent1"/>
+          </a:lnRef>
+          <a:fillRef idx="0">
+            <a:schemeClr val="accent1"/>
+          </a:fillRef>
+          <a:effectRef idx="1">
+            <a:schemeClr val="accent1"/>
+          </a:effectRef>
+          <a:fontRef idx="minor">
+            <a:schemeClr val="tx1"/>
+          </a:fontRef>
+        </p:style>
+      </p:cxnSp>
+      <p:cxnSp>
+        <p:nvCxnSpPr>
+          <p:cNvPr id="19" name="Connector 18"/>
+          <p:cNvCxnSpPr/>
+          <p:nvPr/>
+        </p:nvCxnSpPr>
+        <p:spPr>
+          <a:xfrm>
+            <a:off x="6428232" y="2660904"/>
+            <a:ext cx="265175" cy="0"/>
+          </a:xfrm>
+          <a:prstGeom prst="line">
+            <a:avLst/>
+          </a:prstGeom>
+          <a:ln w="22225">
+            <a:solidFill>
+              <a:srgbClr val="00A693"/>
+            </a:solidFill>
+            <a:tailEnd type="triangle"/>
+          </a:ln>
+        </p:spPr>
+        <p:style>
+          <a:lnRef idx="2">
+            <a:schemeClr val="accent1"/>
+          </a:lnRef>
+          <a:fillRef idx="0">
+            <a:schemeClr val="accent1"/>
+          </a:fillRef>
+          <a:effectRef idx="1">
+            <a:schemeClr val="accent1"/>
+          </a:effectRef>
+          <a:fontRef idx="minor">
+            <a:schemeClr val="tx1"/>
+          </a:fontRef>
+        </p:style>
+      </p:cxnSp>
+      <p:cxnSp>
+        <p:nvCxnSpPr>
+          <p:cNvPr id="20" name="Connector 19"/>
+          <p:cNvCxnSpPr/>
+          <p:nvPr/>
+        </p:nvCxnSpPr>
+        <p:spPr>
+          <a:xfrm>
+            <a:off x="4777740" y="3054096"/>
+            <a:ext cx="0" cy="164592"/>
+          </a:xfrm>
+          <a:prstGeom prst="line">
+            <a:avLst/>
+          </a:prstGeom>
+          <a:ln w="22225">
             <a:solidFill>
               <a:srgbClr val="00A693"/>
             </a:solidFill>
@@ -13899,14 +14046,14 @@
       </p:cxnSp>
       <p:sp>
         <p:nvSpPr>
-          <p:cNvPr id="18" name="TextBox 17"/>
+          <p:cNvPr id="21" name="TextBox 20"/>
           <p:cNvSpPr txBox="1"/>
           <p:nvPr/>
         </p:nvSpPr>
         <p:spPr>
           <a:xfrm>
-            <a:off x="4814316" y="2798064"/>
-            <a:ext cx="2560320" cy="182880"/>
+            <a:off x="4823459" y="3035808"/>
+            <a:ext cx="2651760" cy="182880"/>
           </a:xfrm>
           <a:prstGeom prst="rect">
             <a:avLst/>
@@ -13920,34 +14067,116 @@
           <a:lstStyle/>
           <a:p>
             <a:r>
-              <a:rPr sz="720" b="0">
-                <a:solidFill>
-                  <a:srgbClr val="2E7D32"/>
+              <a:rPr sz="700" b="0">
+                <a:solidFill>
+                  <a:srgbClr val="666666"/>
                 </a:solidFill>
                 <a:latin typeface="メイリオ"/>
                 <a:ea typeface="メイリオ"/>
               </a:rPr>
-              <a:t>できた資料を次の材料にする</a:t>
+              <a:t>成果物を次工程の資料として使用</a:t>
             </a:r>
           </a:p>
         </p:txBody>
       </p:sp>
       <p:sp>
         <p:nvSpPr>
-          <p:cNvPr id="19" name="Rounded Rectangle 18"/>
+          <p:cNvPr id="22" name="Rounded Rectangle 21"/>
           <p:cNvSpPr/>
           <p:nvPr/>
         </p:nvSpPr>
         <p:spPr>
           <a:xfrm>
-            <a:off x="3154680" y="3072384"/>
-            <a:ext cx="3246120" cy="749808"/>
+            <a:off x="228600" y="3236976"/>
+            <a:ext cx="2606040" cy="786384"/>
           </a:xfrm>
           <a:prstGeom prst="roundRect">
             <a:avLst/>
           </a:prstGeom>
           <a:solidFill>
-            <a:srgbClr val="DFF4F1"/>
+            <a:srgbClr val="F4FBFA"/>
+          </a:solidFill>
+          <a:ln w="11430">
+            <a:solidFill>
+              <a:srgbClr val="BFD9D5"/>
+            </a:solidFill>
+          </a:ln>
+        </p:spPr>
+        <p:style>
+          <a:lnRef idx="1">
+            <a:schemeClr val="accent1"/>
+          </a:lnRef>
+          <a:fillRef idx="3">
+            <a:schemeClr val="accent1"/>
+          </a:fillRef>
+          <a:effectRef idx="2">
+            <a:schemeClr val="accent1"/>
+          </a:effectRef>
+          <a:fontRef idx="minor">
+            <a:schemeClr val="lt1"/>
+          </a:fontRef>
+        </p:style>
+        <p:txBody>
+          <a:bodyPr rtlCol="0" anchor="ctr" wrap="square" lIns="64008" rIns="45720" tIns="27432" bIns="27432"/>
+          <a:lstStyle/>
+          <a:p>
+            <a:pPr algn="l">
+              <a:spcBef>
+                <a:spcPts val="0"/>
+              </a:spcBef>
+              <a:spcAft>
+                <a:spcPts val="0"/>
+              </a:spcAft>
+            </a:pPr>
+            <a:r>
+              <a:rPr sz="760" b="0">
+                <a:solidFill>
+                  <a:srgbClr val="333333"/>
+                </a:solidFill>
+                <a:latin typeface="メイリオ"/>
+                <a:ea typeface="メイリオ"/>
+              </a:rPr>
+              <a:t>・要件定義書_画面機能設計書（仮）</a:t>
+            </a:r>
+          </a:p>
+          <a:p>
+            <a:pPr algn="l">
+              <a:spcBef>
+                <a:spcPts val="0"/>
+              </a:spcBef>
+              <a:spcAft>
+                <a:spcPts val="0"/>
+              </a:spcAft>
+            </a:pPr>
+            <a:r>
+              <a:rPr sz="760" b="0">
+                <a:solidFill>
+                  <a:srgbClr val="333333"/>
+                </a:solidFill>
+                <a:latin typeface="メイリオ"/>
+                <a:ea typeface="メイリオ"/>
+              </a:rPr>
+              <a:t>・要件定義書_機能詳細設計書（仮）</a:t>
+            </a:r>
+          </a:p>
+        </p:txBody>
+      </p:sp>
+      <p:sp>
+        <p:nvSpPr>
+          <p:cNvPr id="23" name="Rounded Rectangle 22"/>
+          <p:cNvSpPr/>
+          <p:nvPr/>
+        </p:nvSpPr>
+        <p:spPr>
+          <a:xfrm>
+            <a:off x="3154680" y="3236976"/>
+            <a:ext cx="3246120" cy="786384"/>
+          </a:xfrm>
+          <a:prstGeom prst="roundRect">
+            <a:avLst/>
+          </a:prstGeom>
+          <a:solidFill>
+            <a:srgbClr val="E8F6F4"/>
           </a:solidFill>
           <a:ln w="19050">
             <a:solidFill>
@@ -13973,7 +14202,14 @@
           <a:bodyPr rtlCol="0" anchor="ctr" wrap="square"/>
           <a:lstStyle/>
           <a:p>
-            <a:pPr algn="ctr"/>
+            <a:pPr algn="ctr">
+              <a:spcBef>
+                <a:spcPts val="0"/>
+              </a:spcBef>
+              <a:spcAft>
+                <a:spcPts val="0"/>
+              </a:spcAft>
+            </a:pPr>
             <a:r>
               <a:rPr sz="1100" b="1">
                 <a:solidFill>
@@ -13986,40 +14222,44 @@
             </a:r>
           </a:p>
           <a:p>
-            <a:pPr algn="ctr"/>
+            <a:pPr algn="ctr">
+              <a:spcBef>
+                <a:spcPts val="100"/>
+              </a:spcBef>
+            </a:pPr>
             <a:r>
-              <a:rPr sz="800" b="1">
-                <a:solidFill>
-                  <a:srgbClr val="007A6E"/>
+              <a:rPr sz="780" b="0">
+                <a:solidFill>
+                  <a:srgbClr val="666666"/>
                 </a:solidFill>
                 <a:latin typeface="メイリオ"/>
                 <a:ea typeface="メイリオ"/>
               </a:rPr>
-              <a:t>【弊社が案を作成→打合せで完成】</a:t>
+              <a:t>【弊社作成 → 打合せで完成】</a:t>
             </a:r>
           </a:p>
         </p:txBody>
       </p:sp>
       <p:sp>
         <p:nvSpPr>
-          <p:cNvPr id="20" name="Rounded Rectangle 19"/>
+          <p:cNvPr id="24" name="Rounded Rectangle 23"/>
           <p:cNvSpPr/>
           <p:nvPr/>
         </p:nvSpPr>
         <p:spPr>
           <a:xfrm>
-            <a:off x="228600" y="3232404"/>
-            <a:ext cx="2606040" cy="429768"/>
+            <a:off x="6720840" y="3236976"/>
+            <a:ext cx="2971800" cy="786384"/>
           </a:xfrm>
           <a:prstGeom prst="roundRect">
             <a:avLst/>
           </a:prstGeom>
           <a:solidFill>
-            <a:srgbClr val="FFF3E8"/>
+            <a:srgbClr val="F4FBFA"/>
           </a:solidFill>
-          <a:ln w="12700">
+          <a:ln w="11430">
             <a:solidFill>
-              <a:srgbClr val="E67E22"/>
+              <a:srgbClr val="BFD9D5"/>
             </a:solidFill>
           </a:ln>
         </p:spPr>
@@ -14038,144 +14278,26 @@
           </a:fontRef>
         </p:style>
         <p:txBody>
-          <a:bodyPr rtlCol="0" anchor="ctr" wrap="square" tIns="27432" bIns="18288" lIns="54864"/>
+          <a:bodyPr rtlCol="0" anchor="ctr" wrap="square" lIns="64008" rIns="45720" tIns="27432" bIns="27432"/>
           <a:lstStyle/>
           <a:p>
-            <a:pPr algn="ctr"/>
+            <a:pPr algn="ctr">
+              <a:spcBef>
+                <a:spcPts val="0"/>
+              </a:spcBef>
+              <a:spcAft>
+                <a:spcPts val="0"/>
+              </a:spcAft>
+            </a:pPr>
             <a:r>
-              <a:rPr sz="750" b="1">
-                <a:solidFill>
-                  <a:srgbClr val="E67E22"/>
+              <a:rPr sz="840" b="1">
+                <a:solidFill>
+                  <a:srgbClr val="333333"/>
                 </a:solidFill>
                 <a:latin typeface="メイリオ"/>
                 <a:ea typeface="メイリオ"/>
               </a:rPr>
-              <a:t>ご提供／ヒアリング</a:t>
-            </a:r>
-          </a:p>
-          <a:p>
-            <a:pPr>
-              <a:spcBef>
-                <a:spcPts val="0"/>
-              </a:spcBef>
-              <a:spcAft>
-                <a:spcPts val="0"/>
-              </a:spcAft>
-            </a:pPr>
-            <a:r>
-              <a:rPr sz="720" b="0">
-                <a:solidFill>
-                  <a:srgbClr val="333333"/>
-                </a:solidFill>
-                <a:latin typeface="メイリオ"/>
-                <a:ea typeface="メイリオ"/>
-              </a:rPr>
-              <a:t>・ヒアリング内容</a:t>
-            </a:r>
-          </a:p>
-        </p:txBody>
-      </p:sp>
-      <p:sp>
-        <p:nvSpPr>
-          <p:cNvPr id="21" name="Right Arrow 20"/>
-          <p:cNvSpPr/>
-          <p:nvPr/>
-        </p:nvSpPr>
-        <p:spPr>
-          <a:xfrm>
-            <a:off x="2852928" y="3378708"/>
-            <a:ext cx="265176" cy="137160"/>
-          </a:xfrm>
-          <a:prstGeom prst="rightArrow">
-            <a:avLst/>
-          </a:prstGeom>
-          <a:solidFill>
-            <a:srgbClr val="E67E22"/>
-          </a:solidFill>
-          <a:ln>
-            <a:noFill/>
-          </a:ln>
-        </p:spPr>
-        <p:style>
-          <a:lnRef idx="1">
-            <a:schemeClr val="accent1"/>
-          </a:lnRef>
-          <a:fillRef idx="3">
-            <a:schemeClr val="accent1"/>
-          </a:fillRef>
-          <a:effectRef idx="2">
-            <a:schemeClr val="accent1"/>
-          </a:effectRef>
-          <a:fontRef idx="minor">
-            <a:schemeClr val="lt1"/>
-          </a:fontRef>
-        </p:style>
-        <p:txBody>
-          <a:bodyPr rtlCol="0" anchor="ctr"/>
-          <a:lstStyle/>
-          <a:p>
-            <a:pPr algn="ctr"/>
-          </a:p>
-        </p:txBody>
-      </p:sp>
-      <p:sp>
-        <p:nvSpPr>
-          <p:cNvPr id="22" name="Rounded Rectangle 21"/>
-          <p:cNvSpPr/>
-          <p:nvPr/>
-        </p:nvSpPr>
-        <p:spPr>
-          <a:xfrm>
-            <a:off x="6720840" y="3291840"/>
-            <a:ext cx="2971800" cy="512064"/>
-          </a:xfrm>
-          <a:prstGeom prst="roundRect">
-            <a:avLst/>
-          </a:prstGeom>
-          <a:solidFill>
-            <a:srgbClr val="E9F5EA"/>
-          </a:solidFill>
-          <a:ln w="12700">
-            <a:solidFill>
-              <a:srgbClr val="2E7D32"/>
-            </a:solidFill>
-          </a:ln>
-        </p:spPr>
-        <p:style>
-          <a:lnRef idx="1">
-            <a:schemeClr val="accent1"/>
-          </a:lnRef>
-          <a:fillRef idx="3">
-            <a:schemeClr val="accent1"/>
-          </a:fillRef>
-          <a:effectRef idx="2">
-            <a:schemeClr val="accent1"/>
-          </a:effectRef>
-          <a:fontRef idx="minor">
-            <a:schemeClr val="lt1"/>
-          </a:fontRef>
-        </p:style>
-        <p:txBody>
-          <a:bodyPr rtlCol="0" anchor="ctr" wrap="square"/>
-          <a:lstStyle/>
-          <a:p>
-            <a:pPr algn="ctr">
-              <a:spcBef>
-                <a:spcPts val="0"/>
-              </a:spcBef>
-              <a:spcAft>
-                <a:spcPts val="0"/>
-              </a:spcAft>
-            </a:pPr>
-            <a:r>
-              <a:rPr sz="850" b="1">
-                <a:solidFill>
-                  <a:srgbClr val="2E7D32"/>
-                </a:solidFill>
-                <a:latin typeface="メイリオ"/>
-                <a:ea typeface="メイリオ"/>
-              </a:rPr>
-              <a:t>▶ 要件定義書_画面機能設計書</a:t>
+              <a:t>要件定義書_画面機能設計書</a:t>
             </a:r>
           </a:p>
           <a:p>
@@ -14188,9 +14310,9 @@
               </a:spcAft>
             </a:pPr>
             <a:r>
-              <a:rPr sz="850" b="1">
-                <a:solidFill>
-                  <a:srgbClr val="2E7D32"/>
+              <a:rPr sz="840" b="1">
+                <a:solidFill>
+                  <a:srgbClr val="333333"/>
                 </a:solidFill>
                 <a:latin typeface="メイリオ"/>
                 <a:ea typeface="メイリオ"/>
@@ -14200,64 +14322,93 @@
           </a:p>
         </p:txBody>
       </p:sp>
-      <p:sp>
-        <p:nvSpPr>
-          <p:cNvPr id="23" name="Right Arrow 22"/>
-          <p:cNvSpPr/>
-          <p:nvPr/>
-        </p:nvSpPr>
-        <p:spPr>
-          <a:xfrm>
-            <a:off x="6419088" y="3378708"/>
-            <a:ext cx="265175" cy="137160"/>
-          </a:xfrm>
-          <a:prstGeom prst="rightArrow">
-            <a:avLst/>
-          </a:prstGeom>
-          <a:solidFill>
-            <a:srgbClr val="2E7D32"/>
-          </a:solidFill>
-          <a:ln>
-            <a:noFill/>
-          </a:ln>
-        </p:spPr>
-        <p:style>
-          <a:lnRef idx="1">
-            <a:schemeClr val="accent1"/>
-          </a:lnRef>
-          <a:fillRef idx="3">
-            <a:schemeClr val="accent1"/>
-          </a:fillRef>
-          <a:effectRef idx="2">
-            <a:schemeClr val="accent1"/>
-          </a:effectRef>
-          <a:fontRef idx="minor">
-            <a:schemeClr val="lt1"/>
-          </a:fontRef>
-        </p:style>
-        <p:txBody>
-          <a:bodyPr rtlCol="0" anchor="ctr"/>
-          <a:lstStyle/>
-          <a:p>
-            <a:pPr algn="ctr"/>
-          </a:p>
-        </p:txBody>
-      </p:sp>
       <p:cxnSp>
         <p:nvCxnSpPr>
-          <p:cNvPr id="24" name="Connector 23"/>
+          <p:cNvPr id="25" name="Connector 24"/>
           <p:cNvCxnSpPr/>
           <p:nvPr/>
         </p:nvCxnSpPr>
         <p:spPr>
           <a:xfrm>
-            <a:off x="4777740" y="3822191"/>
-            <a:ext cx="0" cy="274321"/>
+            <a:off x="2862072" y="3630168"/>
+            <a:ext cx="265176" cy="0"/>
           </a:xfrm>
           <a:prstGeom prst="line">
             <a:avLst/>
           </a:prstGeom>
-          <a:ln w="31750">
+          <a:ln w="22225">
+            <a:solidFill>
+              <a:srgbClr val="00A693"/>
+            </a:solidFill>
+            <a:tailEnd type="triangle"/>
+          </a:ln>
+        </p:spPr>
+        <p:style>
+          <a:lnRef idx="2">
+            <a:schemeClr val="accent1"/>
+          </a:lnRef>
+          <a:fillRef idx="0">
+            <a:schemeClr val="accent1"/>
+          </a:fillRef>
+          <a:effectRef idx="1">
+            <a:schemeClr val="accent1"/>
+          </a:effectRef>
+          <a:fontRef idx="minor">
+            <a:schemeClr val="tx1"/>
+          </a:fontRef>
+        </p:style>
+      </p:cxnSp>
+      <p:cxnSp>
+        <p:nvCxnSpPr>
+          <p:cNvPr id="26" name="Connector 25"/>
+          <p:cNvCxnSpPr/>
+          <p:nvPr/>
+        </p:nvCxnSpPr>
+        <p:spPr>
+          <a:xfrm>
+            <a:off x="6428232" y="3630168"/>
+            <a:ext cx="265175" cy="0"/>
+          </a:xfrm>
+          <a:prstGeom prst="line">
+            <a:avLst/>
+          </a:prstGeom>
+          <a:ln w="22225">
+            <a:solidFill>
+              <a:srgbClr val="00A693"/>
+            </a:solidFill>
+            <a:tailEnd type="triangle"/>
+          </a:ln>
+        </p:spPr>
+        <p:style>
+          <a:lnRef idx="2">
+            <a:schemeClr val="accent1"/>
+          </a:lnRef>
+          <a:fillRef idx="0">
+            <a:schemeClr val="accent1"/>
+          </a:fillRef>
+          <a:effectRef idx="1">
+            <a:schemeClr val="accent1"/>
+          </a:effectRef>
+          <a:fontRef idx="minor">
+            <a:schemeClr val="tx1"/>
+          </a:fontRef>
+        </p:style>
+      </p:cxnSp>
+      <p:cxnSp>
+        <p:nvCxnSpPr>
+          <p:cNvPr id="27" name="Connector 26"/>
+          <p:cNvCxnSpPr/>
+          <p:nvPr/>
+        </p:nvCxnSpPr>
+        <p:spPr>
+          <a:xfrm>
+            <a:off x="4777740" y="4023360"/>
+            <a:ext cx="0" cy="164592"/>
+          </a:xfrm>
+          <a:prstGeom prst="line">
+            <a:avLst/>
+          </a:prstGeom>
+          <a:ln w="22225">
             <a:solidFill>
               <a:srgbClr val="00A693"/>
             </a:solidFill>
@@ -14281,14 +14432,14 @@
       </p:cxnSp>
       <p:sp>
         <p:nvSpPr>
-          <p:cNvPr id="25" name="TextBox 24"/>
+          <p:cNvPr id="28" name="TextBox 27"/>
           <p:cNvSpPr txBox="1"/>
           <p:nvPr/>
         </p:nvSpPr>
         <p:spPr>
           <a:xfrm>
-            <a:off x="4814316" y="3822191"/>
-            <a:ext cx="2560320" cy="182880"/>
+            <a:off x="4823459" y="4005072"/>
+            <a:ext cx="2651760" cy="182880"/>
           </a:xfrm>
           <a:prstGeom prst="rect">
             <a:avLst/>
@@ -14302,34 +14453,116 @@
           <a:lstStyle/>
           <a:p>
             <a:r>
-              <a:rPr sz="720" b="0">
-                <a:solidFill>
-                  <a:srgbClr val="2E7D32"/>
+              <a:rPr sz="700" b="0">
+                <a:solidFill>
+                  <a:srgbClr val="666666"/>
                 </a:solidFill>
                 <a:latin typeface="メイリオ"/>
                 <a:ea typeface="メイリオ"/>
               </a:rPr>
-              <a:t>できた資料を次の材料にする</a:t>
+              <a:t>成果物を次工程の資料として使用</a:t>
             </a:r>
           </a:p>
         </p:txBody>
       </p:sp>
       <p:sp>
         <p:nvSpPr>
-          <p:cNvPr id="26" name="Rounded Rectangle 25"/>
+          <p:cNvPr id="29" name="Rounded Rectangle 28"/>
           <p:cNvSpPr/>
           <p:nvPr/>
         </p:nvSpPr>
         <p:spPr>
           <a:xfrm>
-            <a:off x="3154680" y="4096512"/>
-            <a:ext cx="3246120" cy="749808"/>
+            <a:off x="228600" y="4206240"/>
+            <a:ext cx="2606040" cy="786384"/>
           </a:xfrm>
           <a:prstGeom prst="roundRect">
             <a:avLst/>
           </a:prstGeom>
           <a:solidFill>
-            <a:srgbClr val="DFF4F1"/>
+            <a:srgbClr val="F4FBFA"/>
+          </a:solidFill>
+          <a:ln w="11430">
+            <a:solidFill>
+              <a:srgbClr val="BFD9D5"/>
+            </a:solidFill>
+          </a:ln>
+        </p:spPr>
+        <p:style>
+          <a:lnRef idx="1">
+            <a:schemeClr val="accent1"/>
+          </a:lnRef>
+          <a:fillRef idx="3">
+            <a:schemeClr val="accent1"/>
+          </a:fillRef>
+          <a:effectRef idx="2">
+            <a:schemeClr val="accent1"/>
+          </a:effectRef>
+          <a:fontRef idx="minor">
+            <a:schemeClr val="lt1"/>
+          </a:fontRef>
+        </p:style>
+        <p:txBody>
+          <a:bodyPr rtlCol="0" anchor="ctr" wrap="square" lIns="64008" rIns="45720" tIns="27432" bIns="27432"/>
+          <a:lstStyle/>
+          <a:p>
+            <a:pPr algn="l">
+              <a:spcBef>
+                <a:spcPts val="0"/>
+              </a:spcBef>
+              <a:spcAft>
+                <a:spcPts val="0"/>
+              </a:spcAft>
+            </a:pPr>
+            <a:r>
+              <a:rPr sz="760" b="0">
+                <a:solidFill>
+                  <a:srgbClr val="333333"/>
+                </a:solidFill>
+                <a:latin typeface="メイリオ"/>
+                <a:ea typeface="メイリオ"/>
+              </a:rPr>
+              <a:t>・年間注文数・ピーク注文時間帯</a:t>
+            </a:r>
+          </a:p>
+          <a:p>
+            <a:pPr algn="l">
+              <a:spcBef>
+                <a:spcPts val="0"/>
+              </a:spcBef>
+              <a:spcAft>
+                <a:spcPts val="0"/>
+              </a:spcAft>
+            </a:pPr>
+            <a:r>
+              <a:rPr sz="760" b="0">
+                <a:solidFill>
+                  <a:srgbClr val="333333"/>
+                </a:solidFill>
+                <a:latin typeface="メイリオ"/>
+                <a:ea typeface="メイリオ"/>
+              </a:rPr>
+              <a:t>・取引先数・SKU数・利用想定者数</a:t>
+            </a:r>
+          </a:p>
+        </p:txBody>
+      </p:sp>
+      <p:sp>
+        <p:nvSpPr>
+          <p:cNvPr id="30" name="Rounded Rectangle 29"/>
+          <p:cNvSpPr/>
+          <p:nvPr/>
+        </p:nvSpPr>
+        <p:spPr>
+          <a:xfrm>
+            <a:off x="3154680" y="4206240"/>
+            <a:ext cx="3246120" cy="786384"/>
+          </a:xfrm>
+          <a:prstGeom prst="roundRect">
+            <a:avLst/>
+          </a:prstGeom>
+          <a:solidFill>
+            <a:srgbClr val="E8F6F4"/>
           </a:solidFill>
           <a:ln w="19050">
             <a:solidFill>
@@ -14355,7 +14588,14 @@
           <a:bodyPr rtlCol="0" anchor="ctr" wrap="square"/>
           <a:lstStyle/>
           <a:p>
-            <a:pPr algn="ctr"/>
+            <a:pPr algn="ctr">
+              <a:spcBef>
+                <a:spcPts val="0"/>
+              </a:spcBef>
+              <a:spcAft>
+                <a:spcPts val="0"/>
+              </a:spcAft>
+            </a:pPr>
             <a:r>
               <a:rPr sz="1100" b="1">
                 <a:solidFill>
@@ -14368,40 +14608,44 @@
             </a:r>
           </a:p>
           <a:p>
-            <a:pPr algn="ctr"/>
+            <a:pPr algn="ctr">
+              <a:spcBef>
+                <a:spcPts val="100"/>
+              </a:spcBef>
+            </a:pPr>
             <a:r>
-              <a:rPr sz="800" b="1">
-                <a:solidFill>
-                  <a:srgbClr val="007A6E"/>
+              <a:rPr sz="780" b="0">
+                <a:solidFill>
+                  <a:srgbClr val="666666"/>
                 </a:solidFill>
                 <a:latin typeface="メイリオ"/>
                 <a:ea typeface="メイリオ"/>
               </a:rPr>
-              <a:t>【弊社が案を作成→打合せで完成】</a:t>
+              <a:t>【弊社作成 → 打合せで完成】</a:t>
             </a:r>
           </a:p>
         </p:txBody>
       </p:sp>
       <p:sp>
         <p:nvSpPr>
-          <p:cNvPr id="27" name="Rounded Rectangle 26"/>
+          <p:cNvPr id="31" name="Rounded Rectangle 30"/>
           <p:cNvSpPr/>
           <p:nvPr/>
         </p:nvSpPr>
         <p:spPr>
           <a:xfrm>
-            <a:off x="228600" y="4169664"/>
-            <a:ext cx="2606040" cy="603504"/>
+            <a:off x="6720840" y="4206240"/>
+            <a:ext cx="2971800" cy="786384"/>
           </a:xfrm>
           <a:prstGeom prst="roundRect">
             <a:avLst/>
           </a:prstGeom>
           <a:solidFill>
-            <a:srgbClr val="FFF3E8"/>
+            <a:srgbClr val="F4FBFA"/>
           </a:solidFill>
-          <a:ln w="12700">
+          <a:ln w="11430">
             <a:solidFill>
-              <a:srgbClr val="E67E22"/>
+              <a:srgbClr val="BFD9D5"/>
             </a:solidFill>
           </a:ln>
         </p:spPr>
@@ -14420,226 +14664,117 @@
           </a:fontRef>
         </p:style>
         <p:txBody>
-          <a:bodyPr rtlCol="0" anchor="ctr" wrap="square" tIns="27432" bIns="18288" lIns="54864"/>
+          <a:bodyPr rtlCol="0" anchor="ctr" wrap="square" lIns="64008" rIns="45720" tIns="27432" bIns="27432"/>
           <a:lstStyle/>
           <a:p>
-            <a:pPr algn="ctr"/>
+            <a:pPr algn="ctr">
+              <a:spcBef>
+                <a:spcPts val="0"/>
+              </a:spcBef>
+              <a:spcAft>
+                <a:spcPts val="0"/>
+              </a:spcAft>
+            </a:pPr>
             <a:r>
-              <a:rPr sz="750" b="1">
-                <a:solidFill>
-                  <a:srgbClr val="E67E22"/>
+              <a:rPr sz="840" b="1">
+                <a:solidFill>
+                  <a:srgbClr val="333333"/>
                 </a:solidFill>
                 <a:latin typeface="メイリオ"/>
                 <a:ea typeface="メイリオ"/>
               </a:rPr>
-              <a:t>ご提供／ヒアリング</a:t>
+              <a:t>要件定義書_非機能要件</a:t>
             </a:r>
-          </a:p>
-          <a:p>
-            <a:pPr>
-              <a:spcBef>
-                <a:spcPts val="0"/>
-              </a:spcBef>
-              <a:spcAft>
-                <a:spcPts val="0"/>
-              </a:spcAft>
-            </a:pPr>
-            <a:r>
-              <a:rPr sz="720" b="0">
-                <a:solidFill>
-                  <a:srgbClr val="333333"/>
-                </a:solidFill>
-                <a:latin typeface="メイリオ"/>
-                <a:ea typeface="メイリオ"/>
-              </a:rPr>
-              <a:t>・年間注文数・ピーク時間帯</a:t>
-            </a:r>
-          </a:p>
-          <a:p>
-            <a:pPr>
-              <a:spcBef>
-                <a:spcPts val="0"/>
-              </a:spcBef>
-              <a:spcAft>
-                <a:spcPts val="0"/>
-              </a:spcAft>
-            </a:pPr>
-            <a:r>
-              <a:rPr sz="720" b="0">
-                <a:solidFill>
-                  <a:srgbClr val="333333"/>
-                </a:solidFill>
-                <a:latin typeface="メイリオ"/>
-                <a:ea typeface="メイリオ"/>
-              </a:rPr>
-              <a:t>・取引先数・SKU数・利用想定者数</a:t>
-            </a:r>
-          </a:p>
-        </p:txBody>
-      </p:sp>
-      <p:sp>
-        <p:nvSpPr>
-          <p:cNvPr id="28" name="Right Arrow 27"/>
-          <p:cNvSpPr/>
-          <p:nvPr/>
-        </p:nvSpPr>
-        <p:spPr>
-          <a:xfrm>
-            <a:off x="2852928" y="4402836"/>
-            <a:ext cx="265176" cy="137160"/>
-          </a:xfrm>
-          <a:prstGeom prst="rightArrow">
-            <a:avLst/>
-          </a:prstGeom>
-          <a:solidFill>
-            <a:srgbClr val="E67E22"/>
-          </a:solidFill>
-          <a:ln>
-            <a:noFill/>
-          </a:ln>
-        </p:spPr>
-        <p:style>
-          <a:lnRef idx="1">
-            <a:schemeClr val="accent1"/>
-          </a:lnRef>
-          <a:fillRef idx="3">
-            <a:schemeClr val="accent1"/>
-          </a:fillRef>
-          <a:effectRef idx="2">
-            <a:schemeClr val="accent1"/>
-          </a:effectRef>
-          <a:fontRef idx="minor">
-            <a:schemeClr val="lt1"/>
-          </a:fontRef>
-        </p:style>
-        <p:txBody>
-          <a:bodyPr rtlCol="0" anchor="ctr"/>
-          <a:lstStyle/>
-          <a:p>
-            <a:pPr algn="ctr"/>
-          </a:p>
-        </p:txBody>
-      </p:sp>
-      <p:sp>
-        <p:nvSpPr>
-          <p:cNvPr id="29" name="Rounded Rectangle 28"/>
-          <p:cNvSpPr/>
-          <p:nvPr/>
-        </p:nvSpPr>
-        <p:spPr>
-          <a:xfrm>
-            <a:off x="6720840" y="4315968"/>
-            <a:ext cx="2971800" cy="310896"/>
-          </a:xfrm>
-          <a:prstGeom prst="roundRect">
-            <a:avLst/>
-          </a:prstGeom>
-          <a:solidFill>
-            <a:srgbClr val="E9F5EA"/>
-          </a:solidFill>
-          <a:ln w="12700">
-            <a:solidFill>
-              <a:srgbClr val="2E7D32"/>
-            </a:solidFill>
-          </a:ln>
-        </p:spPr>
-        <p:style>
-          <a:lnRef idx="1">
-            <a:schemeClr val="accent1"/>
-          </a:lnRef>
-          <a:fillRef idx="3">
-            <a:schemeClr val="accent1"/>
-          </a:fillRef>
-          <a:effectRef idx="2">
-            <a:schemeClr val="accent1"/>
-          </a:effectRef>
-          <a:fontRef idx="minor">
-            <a:schemeClr val="lt1"/>
-          </a:fontRef>
-        </p:style>
-        <p:txBody>
-          <a:bodyPr rtlCol="0" anchor="ctr" wrap="square"/>
-          <a:lstStyle/>
-          <a:p>
-            <a:pPr algn="ctr">
-              <a:spcBef>
-                <a:spcPts val="0"/>
-              </a:spcBef>
-              <a:spcAft>
-                <a:spcPts val="0"/>
-              </a:spcAft>
-            </a:pPr>
-            <a:r>
-              <a:rPr sz="850" b="1">
-                <a:solidFill>
-                  <a:srgbClr val="2E7D32"/>
-                </a:solidFill>
-                <a:latin typeface="メイリオ"/>
-                <a:ea typeface="メイリオ"/>
-              </a:rPr>
-              <a:t>▶ 要件定義書_非機能要件</a:t>
-            </a:r>
-          </a:p>
-        </p:txBody>
-      </p:sp>
-      <p:sp>
-        <p:nvSpPr>
-          <p:cNvPr id="30" name="Right Arrow 29"/>
-          <p:cNvSpPr/>
-          <p:nvPr/>
-        </p:nvSpPr>
-        <p:spPr>
-          <a:xfrm>
-            <a:off x="6419088" y="4402836"/>
-            <a:ext cx="265175" cy="137160"/>
-          </a:xfrm>
-          <a:prstGeom prst="rightArrow">
-            <a:avLst/>
-          </a:prstGeom>
-          <a:solidFill>
-            <a:srgbClr val="2E7D32"/>
-          </a:solidFill>
-          <a:ln>
-            <a:noFill/>
-          </a:ln>
-        </p:spPr>
-        <p:style>
-          <a:lnRef idx="1">
-            <a:schemeClr val="accent1"/>
-          </a:lnRef>
-          <a:fillRef idx="3">
-            <a:schemeClr val="accent1"/>
-          </a:fillRef>
-          <a:effectRef idx="2">
-            <a:schemeClr val="accent1"/>
-          </a:effectRef>
-          <a:fontRef idx="minor">
-            <a:schemeClr val="lt1"/>
-          </a:fontRef>
-        </p:style>
-        <p:txBody>
-          <a:bodyPr rtlCol="0" anchor="ctr"/>
-          <a:lstStyle/>
-          <a:p>
-            <a:pPr algn="ctr"/>
           </a:p>
         </p:txBody>
       </p:sp>
       <p:cxnSp>
         <p:nvCxnSpPr>
-          <p:cNvPr id="31" name="Connector 30"/>
+          <p:cNvPr id="32" name="Connector 31"/>
           <p:cNvCxnSpPr/>
           <p:nvPr/>
         </p:nvCxnSpPr>
         <p:spPr>
           <a:xfrm>
-            <a:off x="4777740" y="4846320"/>
-            <a:ext cx="0" cy="274320"/>
+            <a:off x="2862072" y="4599431"/>
+            <a:ext cx="265176" cy="0"/>
           </a:xfrm>
           <a:prstGeom prst="line">
             <a:avLst/>
           </a:prstGeom>
-          <a:ln w="31750">
+          <a:ln w="22225">
+            <a:solidFill>
+              <a:srgbClr val="00A693"/>
+            </a:solidFill>
+            <a:tailEnd type="triangle"/>
+          </a:ln>
+        </p:spPr>
+        <p:style>
+          <a:lnRef idx="2">
+            <a:schemeClr val="accent1"/>
+          </a:lnRef>
+          <a:fillRef idx="0">
+            <a:schemeClr val="accent1"/>
+          </a:fillRef>
+          <a:effectRef idx="1">
+            <a:schemeClr val="accent1"/>
+          </a:effectRef>
+          <a:fontRef idx="minor">
+            <a:schemeClr val="tx1"/>
+          </a:fontRef>
+        </p:style>
+      </p:cxnSp>
+      <p:cxnSp>
+        <p:nvCxnSpPr>
+          <p:cNvPr id="33" name="Connector 32"/>
+          <p:cNvCxnSpPr/>
+          <p:nvPr/>
+        </p:nvCxnSpPr>
+        <p:spPr>
+          <a:xfrm>
+            <a:off x="6428232" y="4599431"/>
+            <a:ext cx="265175" cy="0"/>
+          </a:xfrm>
+          <a:prstGeom prst="line">
+            <a:avLst/>
+          </a:prstGeom>
+          <a:ln w="22225">
+            <a:solidFill>
+              <a:srgbClr val="00A693"/>
+            </a:solidFill>
+            <a:tailEnd type="triangle"/>
+          </a:ln>
+        </p:spPr>
+        <p:style>
+          <a:lnRef idx="2">
+            <a:schemeClr val="accent1"/>
+          </a:lnRef>
+          <a:fillRef idx="0">
+            <a:schemeClr val="accent1"/>
+          </a:fillRef>
+          <a:effectRef idx="1">
+            <a:schemeClr val="accent1"/>
+          </a:effectRef>
+          <a:fontRef idx="minor">
+            <a:schemeClr val="tx1"/>
+          </a:fontRef>
+        </p:style>
+      </p:cxnSp>
+      <p:cxnSp>
+        <p:nvCxnSpPr>
+          <p:cNvPr id="34" name="Connector 33"/>
+          <p:cNvCxnSpPr/>
+          <p:nvPr/>
+        </p:nvCxnSpPr>
+        <p:spPr>
+          <a:xfrm>
+            <a:off x="4777740" y="4992624"/>
+            <a:ext cx="0" cy="164592"/>
+          </a:xfrm>
+          <a:prstGeom prst="line">
+            <a:avLst/>
+          </a:prstGeom>
+          <a:ln w="22225">
             <a:solidFill>
               <a:srgbClr val="00A693"/>
             </a:solidFill>
@@ -14663,14 +14798,14 @@
       </p:cxnSp>
       <p:sp>
         <p:nvSpPr>
-          <p:cNvPr id="32" name="TextBox 31"/>
+          <p:cNvPr id="35" name="TextBox 34"/>
           <p:cNvSpPr txBox="1"/>
           <p:nvPr/>
         </p:nvSpPr>
         <p:spPr>
           <a:xfrm>
-            <a:off x="4814316" y="4846320"/>
-            <a:ext cx="2560320" cy="182880"/>
+            <a:off x="4823459" y="4974336"/>
+            <a:ext cx="2651760" cy="182880"/>
           </a:xfrm>
           <a:prstGeom prst="rect">
             <a:avLst/>
@@ -14684,34 +14819,96 @@
           <a:lstStyle/>
           <a:p>
             <a:r>
-              <a:rPr sz="720" b="0">
-                <a:solidFill>
-                  <a:srgbClr val="2E7D32"/>
+              <a:rPr sz="700" b="0">
+                <a:solidFill>
+                  <a:srgbClr val="666666"/>
                 </a:solidFill>
                 <a:latin typeface="メイリオ"/>
                 <a:ea typeface="メイリオ"/>
               </a:rPr>
-              <a:t>できた資料を次の材料にする</a:t>
+              <a:t>成果物を次工程の資料として使用</a:t>
             </a:r>
           </a:p>
         </p:txBody>
       </p:sp>
       <p:sp>
         <p:nvSpPr>
-          <p:cNvPr id="33" name="Rounded Rectangle 32"/>
+          <p:cNvPr id="36" name="Rounded Rectangle 35"/>
           <p:cNvSpPr/>
           <p:nvPr/>
         </p:nvSpPr>
         <p:spPr>
           <a:xfrm>
-            <a:off x="3154680" y="5120640"/>
-            <a:ext cx="3246120" cy="749808"/>
+            <a:off x="228600" y="5175504"/>
+            <a:ext cx="2606040" cy="786384"/>
           </a:xfrm>
           <a:prstGeom prst="roundRect">
             <a:avLst/>
           </a:prstGeom>
           <a:solidFill>
-            <a:srgbClr val="DFF4F1"/>
+            <a:srgbClr val="F4FBFA"/>
+          </a:solidFill>
+          <a:ln w="11430">
+            <a:solidFill>
+              <a:srgbClr val="BFD9D5"/>
+            </a:solidFill>
+          </a:ln>
+        </p:spPr>
+        <p:style>
+          <a:lnRef idx="1">
+            <a:schemeClr val="accent1"/>
+          </a:lnRef>
+          <a:fillRef idx="3">
+            <a:schemeClr val="accent1"/>
+          </a:fillRef>
+          <a:effectRef idx="2">
+            <a:schemeClr val="accent1"/>
+          </a:effectRef>
+          <a:fontRef idx="minor">
+            <a:schemeClr val="lt1"/>
+          </a:fontRef>
+        </p:style>
+        <p:txBody>
+          <a:bodyPr rtlCol="0" anchor="ctr" wrap="square" lIns="64008" rIns="45720" tIns="27432" bIns="27432"/>
+          <a:lstStyle/>
+          <a:p>
+            <a:pPr algn="l">
+              <a:spcBef>
+                <a:spcPts val="0"/>
+              </a:spcBef>
+              <a:spcAft>
+                <a:spcPts val="0"/>
+              </a:spcAft>
+            </a:pPr>
+            <a:r>
+              <a:rPr sz="760" b="0">
+                <a:solidFill>
+                  <a:srgbClr val="333333"/>
+                </a:solidFill>
+                <a:latin typeface="メイリオ"/>
+                <a:ea typeface="メイリオ"/>
+              </a:rPr>
+              <a:t>・①〜④で完成した要件定義書一式</a:t>
+            </a:r>
+          </a:p>
+        </p:txBody>
+      </p:sp>
+      <p:sp>
+        <p:nvSpPr>
+          <p:cNvPr id="37" name="Rounded Rectangle 36"/>
+          <p:cNvSpPr/>
+          <p:nvPr/>
+        </p:nvSpPr>
+        <p:spPr>
+          <a:xfrm>
+            <a:off x="3154680" y="5175504"/>
+            <a:ext cx="3246120" cy="786384"/>
+          </a:xfrm>
+          <a:prstGeom prst="roundRect">
+            <a:avLst/>
+          </a:prstGeom>
+          <a:solidFill>
+            <a:srgbClr val="E8F6F4"/>
           </a:solidFill>
           <a:ln w="19050">
             <a:solidFill>
@@ -14737,7 +14934,14 @@
           <a:bodyPr rtlCol="0" anchor="ctr" wrap="square"/>
           <a:lstStyle/>
           <a:p>
-            <a:pPr algn="ctr"/>
+            <a:pPr algn="ctr">
+              <a:spcBef>
+                <a:spcPts val="0"/>
+              </a:spcBef>
+              <a:spcAft>
+                <a:spcPts val="0"/>
+              </a:spcAft>
+            </a:pPr>
             <a:r>
               <a:rPr sz="1100" b="1">
                 <a:solidFill>
@@ -14746,15 +14950,39 @@
                 <a:latin typeface="メイリオ"/>
                 <a:ea typeface="メイリオ"/>
               </a:rPr>
-              <a:t>5. 納品・正式見積り提示（開発工程のご提案）</a:t>
+              <a:t>5. 納品・正式見積り提示</a:t>
             </a:r>
           </a:p>
           <a:p>
-            <a:pPr algn="ctr"/>
+            <a:pPr algn="ctr">
+              <a:spcBef>
+                <a:spcPts val="0"/>
+              </a:spcBef>
+              <a:spcAft>
+                <a:spcPts val="0"/>
+              </a:spcAft>
+            </a:pPr>
             <a:r>
-              <a:rPr sz="800" b="1">
+              <a:rPr sz="1100" b="1">
                 <a:solidFill>
                   <a:srgbClr val="007A6E"/>
+                </a:solidFill>
+                <a:latin typeface="メイリオ"/>
+                <a:ea typeface="メイリオ"/>
+              </a:rPr>
+              <a:t>（開発工程のご提案）</a:t>
+            </a:r>
+          </a:p>
+          <a:p>
+            <a:pPr algn="ctr">
+              <a:spcBef>
+                <a:spcPts val="100"/>
+              </a:spcBef>
+            </a:pPr>
+            <a:r>
+              <a:rPr sz="780" b="0">
+                <a:solidFill>
+                  <a:srgbClr val="666666"/>
                 </a:solidFill>
                 <a:latin typeface="メイリオ"/>
                 <a:ea typeface="メイリオ"/>
@@ -14766,24 +14994,24 @@
       </p:sp>
       <p:sp>
         <p:nvSpPr>
-          <p:cNvPr id="34" name="Rounded Rectangle 33"/>
+          <p:cNvPr id="38" name="Rounded Rectangle 37"/>
           <p:cNvSpPr/>
           <p:nvPr/>
         </p:nvSpPr>
         <p:spPr>
           <a:xfrm>
-            <a:off x="6720840" y="5340096"/>
-            <a:ext cx="2971800" cy="310896"/>
+            <a:off x="6720840" y="5175504"/>
+            <a:ext cx="2971800" cy="786384"/>
           </a:xfrm>
           <a:prstGeom prst="roundRect">
             <a:avLst/>
           </a:prstGeom>
           <a:solidFill>
-            <a:srgbClr val="E9F5EA"/>
+            <a:srgbClr val="F4FBFA"/>
           </a:solidFill>
-          <a:ln w="12700">
+          <a:ln w="11430">
             <a:solidFill>
-              <a:srgbClr val="2E7D32"/>
+              <a:srgbClr val="BFD9D5"/>
             </a:solidFill>
           </a:ln>
         </p:spPr>
@@ -14802,7 +15030,7 @@
           </a:fontRef>
         </p:style>
         <p:txBody>
-          <a:bodyPr rtlCol="0" anchor="ctr" wrap="square"/>
+          <a:bodyPr rtlCol="0" anchor="ctr" wrap="square" lIns="64008" rIns="45720" tIns="27432" bIns="27432"/>
           <a:lstStyle/>
           <a:p>
             <a:pPr algn="ctr">
@@ -14814,61 +15042,90 @@
               </a:spcAft>
             </a:pPr>
             <a:r>
-              <a:rPr sz="850" b="1">
-                <a:solidFill>
-                  <a:srgbClr val="2E7D32"/>
+              <a:rPr sz="840" b="1">
+                <a:solidFill>
+                  <a:srgbClr val="333333"/>
                 </a:solidFill>
                 <a:latin typeface="メイリオ"/>
                 <a:ea typeface="メイリオ"/>
               </a:rPr>
-              <a:t>▶ 開発範囲・工程・正式お見積り</a:t>
+              <a:t>開発範囲・工程・正式お見積り</a:t>
             </a:r>
           </a:p>
         </p:txBody>
       </p:sp>
-      <p:sp>
-        <p:nvSpPr>
-          <p:cNvPr id="35" name="Right Arrow 34"/>
-          <p:cNvSpPr/>
+      <p:cxnSp>
+        <p:nvCxnSpPr>
+          <p:cNvPr id="39" name="Connector 38"/>
+          <p:cNvCxnSpPr/>
           <p:nvPr/>
-        </p:nvSpPr>
+        </p:nvCxnSpPr>
         <p:spPr>
           <a:xfrm>
-            <a:off x="6419088" y="5426964"/>
-            <a:ext cx="265175" cy="137160"/>
+            <a:off x="2862072" y="5568696"/>
+            <a:ext cx="265176" cy="0"/>
           </a:xfrm>
-          <a:prstGeom prst="rightArrow">
+          <a:prstGeom prst="line">
             <a:avLst/>
           </a:prstGeom>
-          <a:solidFill>
-            <a:srgbClr val="2E7D32"/>
-          </a:solidFill>
-          <a:ln>
-            <a:noFill/>
+          <a:ln w="22225">
+            <a:solidFill>
+              <a:srgbClr val="00A693"/>
+            </a:solidFill>
+            <a:tailEnd type="triangle"/>
           </a:ln>
         </p:spPr>
         <p:style>
-          <a:lnRef idx="1">
+          <a:lnRef idx="2">
             <a:schemeClr val="accent1"/>
           </a:lnRef>
-          <a:fillRef idx="3">
+          <a:fillRef idx="0">
             <a:schemeClr val="accent1"/>
           </a:fillRef>
-          <a:effectRef idx="2">
+          <a:effectRef idx="1">
             <a:schemeClr val="accent1"/>
           </a:effectRef>
           <a:fontRef idx="minor">
-            <a:schemeClr val="lt1"/>
+            <a:schemeClr val="tx1"/>
           </a:fontRef>
         </p:style>
-        <p:txBody>
-          <a:bodyPr rtlCol="0" anchor="ctr"/>
-          <a:lstStyle/>
-          <a:p>
-            <a:pPr algn="ctr"/>
-          </a:p>
-        </p:txBody>
-      </p:sp>
+      </p:cxnSp>
+      <p:cxnSp>
+        <p:nvCxnSpPr>
+          <p:cNvPr id="40" name="Connector 39"/>
+          <p:cNvCxnSpPr/>
+          <p:nvPr/>
+        </p:nvCxnSpPr>
+        <p:spPr>
+          <a:xfrm>
+            <a:off x="6428232" y="5568696"/>
+            <a:ext cx="265175" cy="0"/>
+          </a:xfrm>
+          <a:prstGeom prst="line">
+            <a:avLst/>
+          </a:prstGeom>
+          <a:ln w="22225">
+            <a:solidFill>
+              <a:srgbClr val="00A693"/>
+            </a:solidFill>
+            <a:tailEnd type="triangle"/>
+          </a:ln>
+        </p:spPr>
+        <p:style>
+          <a:lnRef idx="2">
+            <a:schemeClr val="accent1"/>
+          </a:lnRef>
+          <a:fillRef idx="0">
+            <a:schemeClr val="accent1"/>
+          </a:fillRef>
+          <a:effectRef idx="1">
+            <a:schemeClr val="accent1"/>
+          </a:effectRef>
+          <a:fontRef idx="minor">
+            <a:schemeClr val="tx1"/>
+          </a:fontRef>
+        </p:style>
+      </p:cxnSp>
     </p:spTree>
   </p:cSld>
   <p:clrMapOvr>
